--- a/portfolio_frame/portfolio_frame.pptx
+++ b/portfolio_frame/portfolio_frame.pptx
@@ -511,7 +511,7 @@
         <p:spPr>
           <a:xfrm>
             <a:off x="1219200" y="8128000"/>
-            <a:ext cx="1435100" cy="660400"/>
+            <a:ext cx="1435100" cy="635000"/>
           </a:xfrm>
           <a:prstGeom prst="rect">
             <a:avLst/>
@@ -1702,7 +1702,7 @@
         <p:spPr>
           <a:xfrm>
             <a:off x="1168400" y="1930400"/>
-            <a:ext cx="3022600" cy="1397000"/>
+            <a:ext cx="3022600" cy="1333500"/>
           </a:xfrm>
           <a:prstGeom prst="rect">
             <a:avLst/>

--- a/portfolio_frame/portfolio_frame.pptx
+++ b/portfolio_frame/portfolio_frame.pptx
@@ -1721,7 +1721,7 @@
         <p:spPr>
           <a:xfrm>
             <a:off x="1219200" y="3454400"/>
-            <a:ext cx="5461000" cy="431800"/>
+            <a:ext cx="5588000" cy="431800"/>
           </a:xfrm>
           <a:prstGeom prst="rect">
             <a:avLst/>
@@ -1741,16 +1741,16 @@
               </a:lnSpc>
             </a:pPr>
             <a:r>
-              <a:rPr lang="en-US" sz="1900" noProof="1" spc="300" kern="0">
+              <a:rPr lang="en-US" sz="1700" noProof="1" spc="200" kern="0">
                 <a:solidFill>
                   <a:srgbClr val="E8A33D"/>
                 </a:solidFill>
                 <a:latin typeface="JetBrains Mono"/>
                 <a:ea typeface="JetBrains Mono"/>
               </a:rPr>
-              <a:t>DIRECTOR × DESIGNER × DEVELOPER</a:t>
-            </a:r>
-            <a:endParaRPr lang="en-US" sz="1900" noProof="1"/>
+              <a:t>视觉传达设计 23 级毕业生 · 主攻视频创作方向</a:t>
+            </a:r>
+            <a:endParaRPr lang="en-US" sz="1700" noProof="1"/>
           </a:p>
         </p:txBody>
       </p:sp>
@@ -1784,8 +1784,8 @@
         </p:nvSpPr>
         <p:spPr>
           <a:xfrm>
-            <a:off x="1219200" y="4470400"/>
-            <a:ext cx="5207000" cy="2032000"/>
+            <a:off x="1219200" y="4368800"/>
+            <a:ext cx="5334000" cy="2540000"/>
           </a:xfrm>
           <a:prstGeom prst="rect">
             <a:avLst/>
@@ -1801,20 +1801,38 @@
           <a:p>
             <a:pPr algn="l">
               <a:lnSpc>
-                <a:spcPct val="165000"/>
-              </a:lnSpc>
-            </a:pPr>
-            <a:r>
-              <a:rPr lang="en-US" sz="2200" noProof="1">
+                <a:spcPct val="155000"/>
+              </a:lnSpc>
+            </a:pPr>
+            <a:r>
+              <a:rPr lang="en-US" sz="2000" noProof="1">
                 <a:solidFill>
                   <a:srgbClr val="C7CDD6"/>
                 </a:solidFill>
                 <a:latin typeface="MiSans"/>
                 <a:ea typeface="MiSans"/>
               </a:rPr>
-              <a:t>AIGC 短片导演，也做视觉设计与前端开发。过去一年，用 AI 完成了六件作品——从末日校园的爱情短片，到一座需要「慢下来」的古镇网页。</a:t>
-            </a:r>
-            <a:endParaRPr lang="en-US" sz="2200" noProof="1"/>
+              <a:t>我喜欢把脑海里那些还没被定义的画面，变成可以播放的东西。AI 是我实现想法的工具——它不替代创意，只负责缩短想法落地的距离。</a:t>
+            </a:r>
+            <a:endParaRPr lang="en-US" sz="2000" noProof="1"/>
+          </a:p>
+          <a:p>
+            <a:pPr algn="l">
+              <a:lnSpc>
+                <a:spcPct val="155000"/>
+              </a:lnSpc>
+            </a:pPr>
+            <a:r>
+              <a:rPr lang="en-US" sz="2000" noProof="1">
+                <a:solidFill>
+                  <a:srgbClr val="C7CDD6"/>
+                </a:solidFill>
+                <a:latin typeface="MiSans"/>
+                <a:ea typeface="MiSans"/>
+              </a:rPr>
+              <a:t>每一段视频都是一次把不可见的东西变成可见的尝试。我的目标是让每一个想法从构思到成片都不被辜负。</a:t>
+            </a:r>
+            <a:endParaRPr lang="en-US" sz="2000" noProof="1"/>
           </a:p>
         </p:txBody>
       </p:sp>
@@ -1826,7 +1844,7 @@
         </p:nvSpPr>
         <p:spPr>
           <a:xfrm>
-            <a:off x="1219200" y="6934200"/>
+            <a:off x="1219200" y="7315200"/>
             <a:ext cx="4064000" cy="685800"/>
           </a:xfrm>
           <a:prstGeom prst="roundRect">
@@ -1854,7 +1872,7 @@
         </p:nvSpPr>
         <p:spPr>
           <a:xfrm>
-            <a:off x="1574800" y="6934200"/>
+            <a:off x="1574800" y="7315200"/>
             <a:ext cx="3429000" cy="685800"/>
           </a:xfrm>
           <a:prstGeom prst="rect">
@@ -1896,7 +1914,7 @@
         </p:nvSpPr>
         <p:spPr>
           <a:xfrm>
-            <a:off x="1320800" y="7175500"/>
+            <a:off x="1320800" y="7556500"/>
             <a:ext cx="203200" cy="203200"/>
           </a:xfrm>
           <a:prstGeom prst="ellipse">
@@ -1918,7 +1936,7 @@
         </p:nvSpPr>
         <p:spPr>
           <a:xfrm>
-            <a:off x="1219200" y="7823200"/>
+            <a:off x="1219200" y="8204200"/>
             <a:ext cx="4064000" cy="685800"/>
           </a:xfrm>
           <a:prstGeom prst="roundRect">
@@ -1946,7 +1964,7 @@
         </p:nvSpPr>
         <p:spPr>
           <a:xfrm>
-            <a:off x="1574800" y="7823200"/>
+            <a:off x="1574800" y="8204200"/>
             <a:ext cx="3429000" cy="685800"/>
           </a:xfrm>
           <a:prstGeom prst="rect">
@@ -1988,7 +2006,7 @@
         </p:nvSpPr>
         <p:spPr>
           <a:xfrm>
-            <a:off x="1320800" y="8064500"/>
+            <a:off x="1320800" y="8445500"/>
             <a:ext cx="203200" cy="203200"/>
           </a:xfrm>
           <a:prstGeom prst="ellipse">
@@ -2010,7 +2028,7 @@
         </p:nvSpPr>
         <p:spPr>
           <a:xfrm>
-            <a:off x="1219200" y="8712200"/>
+            <a:off x="1219200" y="9093200"/>
             <a:ext cx="4064000" cy="685800"/>
           </a:xfrm>
           <a:prstGeom prst="roundRect">
@@ -2038,7 +2056,7 @@
         </p:nvSpPr>
         <p:spPr>
           <a:xfrm>
-            <a:off x="1574800" y="8712200"/>
+            <a:off x="1574800" y="9093200"/>
             <a:ext cx="3429000" cy="685800"/>
           </a:xfrm>
           <a:prstGeom prst="rect">
@@ -2080,7 +2098,7 @@
         </p:nvSpPr>
         <p:spPr>
           <a:xfrm>
-            <a:off x="1320800" y="8953500"/>
+            <a:off x="1320800" y="9334500"/>
             <a:ext cx="203200" cy="203200"/>
           </a:xfrm>
           <a:prstGeom prst="ellipse">
@@ -2102,7 +2120,7 @@
         </p:nvSpPr>
         <p:spPr>
           <a:xfrm>
-            <a:off x="1219200" y="9982200"/>
+            <a:off x="1219200" y="10236200"/>
             <a:ext cx="5334000" cy="762000"/>
           </a:xfrm>
           <a:prstGeom prst="rect">

--- a/portfolio_frame/portfolio_frame.pptx
+++ b/portfolio_frame/portfolio_frame.pptx
@@ -613,7 +613,7 @@
         </p:nvPicPr>
         <p:blipFill>
           <a:blip r:embed="rId3"/>
-          <a:srcRect t="36" b="36"/>
+          <a:srcRect l="4967" r="4967"/>
           <a:stretch>
             <a:fillRect/>
           </a:stretch>
@@ -705,7 +705,7 @@
         </p:nvPicPr>
         <p:blipFill>
           <a:blip r:embed="rId4"/>
-          <a:srcRect t="36" b="36"/>
+          <a:srcRect l="6332" r="6332"/>
           <a:stretch>
             <a:fillRect/>
           </a:stretch>
@@ -797,7 +797,7 @@
         </p:nvPicPr>
         <p:blipFill>
           <a:blip r:embed="rId5"/>
-          <a:srcRect t="36" b="36"/>
+          <a:srcRect l="4944" r="4944"/>
           <a:stretch>
             <a:fillRect/>
           </a:stretch>
@@ -889,7 +889,7 @@
         </p:nvPicPr>
         <p:blipFill>
           <a:blip r:embed="rId6"/>
-          <a:srcRect t="36" b="36"/>
+          <a:srcRect l="4972" r="4972"/>
           <a:stretch>
             <a:fillRect/>
           </a:stretch>
@@ -981,7 +981,7 @@
         </p:nvPicPr>
         <p:blipFill>
           <a:blip r:embed="rId7"/>
-          <a:srcRect t="36" b="36"/>
+          <a:srcRect l="4967" r="4967"/>
           <a:stretch>
             <a:fillRect/>
           </a:stretch>
@@ -1073,7 +1073,7 @@
         </p:nvPicPr>
         <p:blipFill>
           <a:blip r:embed="rId8"/>
-          <a:srcRect t="36" b="36"/>
+          <a:srcRect l="4967" r="4967"/>
           <a:stretch>
             <a:fillRect/>
           </a:stretch>
@@ -3268,7 +3268,7 @@
                 <a:latin typeface="MiSans"/>
                 <a:ea typeface="MiSans"/>
               </a:rPr>
-              <a:t>枫泾古镇</a:t>
+              <a:t>枫泾古镇 FENGJING</a:t>
             </a:r>
             <a:endParaRPr lang="en-US" sz="2300" noProof="1"/>
           </a:p>
@@ -3310,7 +3310,7 @@
                 <a:latin typeface="MiSans"/>
                 <a:ea typeface="MiSans"/>
               </a:rPr>
-              <a:t>网页设计 + 前端 · 2025</a:t>
+              <a:t>响应式 Slow Web · 2025</a:t>
             </a:r>
             <a:endParaRPr lang="en-US" sz="1600" noProof="1"/>
           </a:p>
